--- a/FraudAnalysis_ReportedCases.pptx
+++ b/FraudAnalysis_ReportedCases.pptx
@@ -3392,6 +3392,14 @@
 <file path=ppt/slides/slide2.xml><?xml version="1.0" encoding="utf-8"?>
 <p:sld xmlns:a="http://schemas.openxmlformats.org/drawingml/2006/main" xmlns:r="http://schemas.openxmlformats.org/officeDocument/2006/relationships" xmlns:p="http://schemas.openxmlformats.org/presentationml/2006/main">
   <p:cSld>
+    <p:bg>
+      <p:bgPr>
+        <a:solidFill>
+          <a:schemeClr val="bg1"/>
+        </a:solidFill>
+        <a:effectLst/>
+      </p:bgPr>
+    </p:bg>
     <p:spTree>
       <p:nvGrpSpPr>
         <p:cNvPr id="1" name=""/>
@@ -3406,43 +3414,378 @@
           <a:chExt cx="0" cy="0"/>
         </a:xfrm>
       </p:grpSpPr>
-      <p:sp>
-        <p:nvSpPr>
-          <p:cNvPr id="2" name="Title 1">
-            <a:extLst>
-              <a:ext uri="{FF2B5EF4-FFF2-40B4-BE49-F238E27FC236}">
-                <a16:creationId xmlns:a16="http://schemas.microsoft.com/office/drawing/2014/main" id="{0604B8F7-ABEF-F3D1-0870-89515F2E3357}"/>
-              </a:ext>
-            </a:extLst>
-          </p:cNvPr>
-          <p:cNvSpPr>
-            <a:spLocks noGrp="1"/>
-          </p:cNvSpPr>
-          <p:nvPr>
-            <p:ph type="title"/>
+      <p:sp useBgFill="1">
+        <p:nvSpPr>
+          <p:cNvPr id="10" name="Rectangle 9">
+            <a:extLst>
+              <a:ext uri="{FF2B5EF4-FFF2-40B4-BE49-F238E27FC236}">
+                <a16:creationId xmlns:a16="http://schemas.microsoft.com/office/drawing/2014/main" id="{665DBBEF-238B-476B-96AB-8AAC3224ECEA}"/>
+              </a:ext>
+              <a:ext uri="{C183D7F6-B498-43B3-948B-1728B52AA6E4}">
+                <adec:decorative xmlns:adec="http://schemas.microsoft.com/office/drawing/2017/decorative" val="1"/>
+              </a:ext>
+            </a:extLst>
+          </p:cNvPr>
+          <p:cNvSpPr>
+            <a:spLocks noGrp="1" noRot="1" noChangeAspect="1" noMove="1" noResize="1" noEditPoints="1" noAdjustHandles="1" noChangeArrowheads="1" noChangeShapeType="1" noTextEdit="1"/>
+          </p:cNvSpPr>
+          <p:nvPr>
+            <p:extLst>
+              <p:ext uri="{386F3935-93C4-4BCD-93E2-E3B085C9AB24}">
+                <p16:designElem xmlns:p16="http://schemas.microsoft.com/office/powerpoint/2015/main" val="1"/>
+              </p:ext>
+            </p:extLst>
           </p:nvPr>
         </p:nvSpPr>
         <p:spPr>
           <a:xfrm>
-            <a:off x="343930" y="179774"/>
-            <a:ext cx="10097530" cy="524561"/>
+            <a:off x="0" y="0"/>
+            <a:ext cx="12192000" cy="6858000"/>
+          </a:xfrm>
+          <a:prstGeom prst="rect">
+            <a:avLst/>
+          </a:prstGeom>
+          <a:ln>
+            <a:noFill/>
+          </a:ln>
+        </p:spPr>
+        <p:style>
+          <a:lnRef idx="2">
+            <a:schemeClr val="accent1">
+              <a:shade val="50000"/>
+            </a:schemeClr>
+          </a:lnRef>
+          <a:fillRef idx="1">
+            <a:schemeClr val="accent1"/>
+          </a:fillRef>
+          <a:effectRef idx="0">
+            <a:schemeClr val="accent1"/>
+          </a:effectRef>
+          <a:fontRef idx="minor">
+            <a:schemeClr val="lt1"/>
+          </a:fontRef>
+        </p:style>
+        <p:txBody>
+          <a:bodyPr rtlCol="0" anchor="ctr"/>
+          <a:lstStyle/>
+          <a:p>
+            <a:pPr algn="ctr"/>
+            <a:endParaRPr lang="en-US"/>
+          </a:p>
+        </p:txBody>
+      </p:sp>
+      <p:sp>
+        <p:nvSpPr>
+          <p:cNvPr id="2" name="Title 1">
+            <a:extLst>
+              <a:ext uri="{FF2B5EF4-FFF2-40B4-BE49-F238E27FC236}">
+                <a16:creationId xmlns:a16="http://schemas.microsoft.com/office/drawing/2014/main" id="{0604B8F7-ABEF-F3D1-0870-89515F2E3357}"/>
+              </a:ext>
+            </a:extLst>
+          </p:cNvPr>
+          <p:cNvSpPr>
+            <a:spLocks noGrp="1"/>
+          </p:cNvSpPr>
+          <p:nvPr>
+            <p:ph type="title"/>
+          </p:nvPr>
+        </p:nvSpPr>
+        <p:spPr>
+          <a:xfrm>
+            <a:off x="638882" y="639193"/>
+            <a:ext cx="3571810" cy="3573516"/>
           </a:xfrm>
         </p:spPr>
         <p:txBody>
-          <a:bodyPr>
-            <a:normAutofit fontScale="90000"/>
+          <a:bodyPr vert="horz" lIns="91440" tIns="45720" rIns="91440" bIns="45720" rtlCol="0" anchor="b">
+            <a:normAutofit/>
           </a:bodyPr>
           <a:lstStyle/>
           <a:p>
             <a:r>
-              <a:rPr lang="en-US" dirty="0"/>
-              <a:t>Reported Hours More than P{</a:t>
-            </a:r>
-            <a:r>
-              <a:rPr lang="en-US" dirty="0" err="1"/>
-              <a:t>ossible</a:t>
-            </a:r>
-            <a:endParaRPr lang="en-US" dirty="0"/>
+              <a:rPr lang="en-US" sz="6100" kern="1200">
+                <a:solidFill>
+                  <a:schemeClr val="tx1"/>
+                </a:solidFill>
+                <a:latin typeface="+mj-lt"/>
+                <a:ea typeface="+mj-ea"/>
+                <a:cs typeface="+mj-cs"/>
+              </a:rPr>
+              <a:t>Reported Hours More than P{ossible</a:t>
+            </a:r>
+          </a:p>
+        </p:txBody>
+      </p:sp>
+      <p:sp>
+        <p:nvSpPr>
+          <p:cNvPr id="12" name="sketch line">
+            <a:extLst>
+              <a:ext uri="{FF2B5EF4-FFF2-40B4-BE49-F238E27FC236}">
+                <a16:creationId xmlns:a16="http://schemas.microsoft.com/office/drawing/2014/main" id="{3FCFB1DE-0B7E-48CC-BA90-B2AB0889F9D6}"/>
+              </a:ext>
+              <a:ext uri="{C183D7F6-B498-43B3-948B-1728B52AA6E4}">
+                <adec:decorative xmlns:adec="http://schemas.microsoft.com/office/drawing/2017/decorative" val="1"/>
+              </a:ext>
+            </a:extLst>
+          </p:cNvPr>
+          <p:cNvSpPr>
+            <a:spLocks noGrp="1" noRot="1" noChangeAspect="1" noMove="1" noResize="1" noEditPoints="1" noAdjustHandles="1" noChangeArrowheads="1" noChangeShapeType="1" noTextEdit="1"/>
+          </p:cNvSpPr>
+          <p:nvPr>
+            <p:extLst>
+              <p:ext uri="{386F3935-93C4-4BCD-93E2-E3B085C9AB24}">
+                <p16:designElem xmlns:p16="http://schemas.microsoft.com/office/powerpoint/2015/main" val="1"/>
+              </p:ext>
+            </p:extLst>
+          </p:nvPr>
+        </p:nvSpPr>
+        <p:spPr>
+          <a:xfrm>
+            <a:off x="643278" y="4409267"/>
+            <a:ext cx="3255095" cy="18288"/>
+          </a:xfrm>
+          <a:custGeom>
+            <a:avLst/>
+            <a:gdLst>
+              <a:gd name="connsiteX0" fmla="*/ 0 w 3255095"/>
+              <a:gd name="connsiteY0" fmla="*/ 0 h 18288"/>
+              <a:gd name="connsiteX1" fmla="*/ 618468 w 3255095"/>
+              <a:gd name="connsiteY1" fmla="*/ 0 h 18288"/>
+              <a:gd name="connsiteX2" fmla="*/ 1269487 w 3255095"/>
+              <a:gd name="connsiteY2" fmla="*/ 0 h 18288"/>
+              <a:gd name="connsiteX3" fmla="*/ 1953057 w 3255095"/>
+              <a:gd name="connsiteY3" fmla="*/ 0 h 18288"/>
+              <a:gd name="connsiteX4" fmla="*/ 2636627 w 3255095"/>
+              <a:gd name="connsiteY4" fmla="*/ 0 h 18288"/>
+              <a:gd name="connsiteX5" fmla="*/ 3255095 w 3255095"/>
+              <a:gd name="connsiteY5" fmla="*/ 0 h 18288"/>
+              <a:gd name="connsiteX6" fmla="*/ 3255095 w 3255095"/>
+              <a:gd name="connsiteY6" fmla="*/ 18288 h 18288"/>
+              <a:gd name="connsiteX7" fmla="*/ 2538974 w 3255095"/>
+              <a:gd name="connsiteY7" fmla="*/ 18288 h 18288"/>
+              <a:gd name="connsiteX8" fmla="*/ 1822853 w 3255095"/>
+              <a:gd name="connsiteY8" fmla="*/ 18288 h 18288"/>
+              <a:gd name="connsiteX9" fmla="*/ 1171834 w 3255095"/>
+              <a:gd name="connsiteY9" fmla="*/ 18288 h 18288"/>
+              <a:gd name="connsiteX10" fmla="*/ 0 w 3255095"/>
+              <a:gd name="connsiteY10" fmla="*/ 18288 h 18288"/>
+              <a:gd name="connsiteX11" fmla="*/ 0 w 3255095"/>
+              <a:gd name="connsiteY11" fmla="*/ 0 h 18288"/>
+            </a:gdLst>
+            <a:ahLst/>
+            <a:cxnLst>
+              <a:cxn ang="0">
+                <a:pos x="connsiteX0" y="connsiteY0"/>
+              </a:cxn>
+              <a:cxn ang="0">
+                <a:pos x="connsiteX1" y="connsiteY1"/>
+              </a:cxn>
+              <a:cxn ang="0">
+                <a:pos x="connsiteX2" y="connsiteY2"/>
+              </a:cxn>
+              <a:cxn ang="0">
+                <a:pos x="connsiteX3" y="connsiteY3"/>
+              </a:cxn>
+              <a:cxn ang="0">
+                <a:pos x="connsiteX4" y="connsiteY4"/>
+              </a:cxn>
+              <a:cxn ang="0">
+                <a:pos x="connsiteX5" y="connsiteY5"/>
+              </a:cxn>
+              <a:cxn ang="0">
+                <a:pos x="connsiteX6" y="connsiteY6"/>
+              </a:cxn>
+              <a:cxn ang="0">
+                <a:pos x="connsiteX7" y="connsiteY7"/>
+              </a:cxn>
+              <a:cxn ang="0">
+                <a:pos x="connsiteX8" y="connsiteY8"/>
+              </a:cxn>
+              <a:cxn ang="0">
+                <a:pos x="connsiteX9" y="connsiteY9"/>
+              </a:cxn>
+              <a:cxn ang="0">
+                <a:pos x="connsiteX10" y="connsiteY10"/>
+              </a:cxn>
+              <a:cxn ang="0">
+                <a:pos x="connsiteX11" y="connsiteY11"/>
+              </a:cxn>
+            </a:cxnLst>
+            <a:rect l="l" t="t" r="r" b="b"/>
+            <a:pathLst>
+              <a:path w="3255095" h="18288" fill="none" extrusionOk="0">
+                <a:moveTo>
+                  <a:pt x="0" y="0"/>
+                </a:moveTo>
+                <a:cubicBezTo>
+                  <a:pt x="240201" y="-22123"/>
+                  <a:pt x="462021" y="-19623"/>
+                  <a:pt x="618468" y="0"/>
+                </a:cubicBezTo>
+                <a:cubicBezTo>
+                  <a:pt x="774915" y="19623"/>
+                  <a:pt x="974734" y="2035"/>
+                  <a:pt x="1269487" y="0"/>
+                </a:cubicBezTo>
+                <a:cubicBezTo>
+                  <a:pt x="1564240" y="-2035"/>
+                  <a:pt x="1733579" y="10639"/>
+                  <a:pt x="1953057" y="0"/>
+                </a:cubicBezTo>
+                <a:cubicBezTo>
+                  <a:pt x="2172535" y="-10639"/>
+                  <a:pt x="2453962" y="14018"/>
+                  <a:pt x="2636627" y="0"/>
+                </a:cubicBezTo>
+                <a:cubicBezTo>
+                  <a:pt x="2819292" y="-14018"/>
+                  <a:pt x="3121375" y="5399"/>
+                  <a:pt x="3255095" y="0"/>
+                </a:cubicBezTo>
+                <a:cubicBezTo>
+                  <a:pt x="3254386" y="8157"/>
+                  <a:pt x="3254682" y="12125"/>
+                  <a:pt x="3255095" y="18288"/>
+                </a:cubicBezTo>
+                <a:cubicBezTo>
+                  <a:pt x="3088545" y="23203"/>
+                  <a:pt x="2687475" y="7419"/>
+                  <a:pt x="2538974" y="18288"/>
+                </a:cubicBezTo>
+                <a:cubicBezTo>
+                  <a:pt x="2390473" y="29157"/>
+                  <a:pt x="2137381" y="-8959"/>
+                  <a:pt x="1822853" y="18288"/>
+                </a:cubicBezTo>
+                <a:cubicBezTo>
+                  <a:pt x="1508325" y="45535"/>
+                  <a:pt x="1466437" y="20385"/>
+                  <a:pt x="1171834" y="18288"/>
+                </a:cubicBezTo>
+                <a:cubicBezTo>
+                  <a:pt x="877231" y="16191"/>
+                  <a:pt x="561097" y="37643"/>
+                  <a:pt x="0" y="18288"/>
+                </a:cubicBezTo>
+                <a:cubicBezTo>
+                  <a:pt x="-46" y="12483"/>
+                  <a:pt x="-203" y="6491"/>
+                  <a:pt x="0" y="0"/>
+                </a:cubicBezTo>
+                <a:close/>
+              </a:path>
+              <a:path w="3255095" h="18288" stroke="0" extrusionOk="0">
+                <a:moveTo>
+                  <a:pt x="0" y="0"/>
+                </a:moveTo>
+                <a:cubicBezTo>
+                  <a:pt x="291965" y="19429"/>
+                  <a:pt x="363155" y="8568"/>
+                  <a:pt x="618468" y="0"/>
+                </a:cubicBezTo>
+                <a:cubicBezTo>
+                  <a:pt x="873781" y="-8568"/>
+                  <a:pt x="904459" y="-19505"/>
+                  <a:pt x="1171834" y="0"/>
+                </a:cubicBezTo>
+                <a:cubicBezTo>
+                  <a:pt x="1439209" y="19505"/>
+                  <a:pt x="1744369" y="9790"/>
+                  <a:pt x="1887955" y="0"/>
+                </a:cubicBezTo>
+                <a:cubicBezTo>
+                  <a:pt x="2031541" y="-9790"/>
+                  <a:pt x="2346378" y="21240"/>
+                  <a:pt x="2506423" y="0"/>
+                </a:cubicBezTo>
+                <a:cubicBezTo>
+                  <a:pt x="2666468" y="-21240"/>
+                  <a:pt x="2990257" y="30414"/>
+                  <a:pt x="3255095" y="0"/>
+                </a:cubicBezTo>
+                <a:cubicBezTo>
+                  <a:pt x="3254831" y="4493"/>
+                  <a:pt x="3255479" y="9472"/>
+                  <a:pt x="3255095" y="18288"/>
+                </a:cubicBezTo>
+                <a:cubicBezTo>
+                  <a:pt x="3120743" y="16690"/>
+                  <a:pt x="2759628" y="42462"/>
+                  <a:pt x="2604076" y="18288"/>
+                </a:cubicBezTo>
+                <a:cubicBezTo>
+                  <a:pt x="2448524" y="-5886"/>
+                  <a:pt x="2184336" y="19599"/>
+                  <a:pt x="1887955" y="18288"/>
+                </a:cubicBezTo>
+                <a:cubicBezTo>
+                  <a:pt x="1591574" y="16977"/>
+                  <a:pt x="1548845" y="6870"/>
+                  <a:pt x="1334589" y="18288"/>
+                </a:cubicBezTo>
+                <a:cubicBezTo>
+                  <a:pt x="1120333" y="29706"/>
+                  <a:pt x="996014" y="9662"/>
+                  <a:pt x="683570" y="18288"/>
+                </a:cubicBezTo>
+                <a:cubicBezTo>
+                  <a:pt x="371126" y="26914"/>
+                  <a:pt x="198687" y="16167"/>
+                  <a:pt x="0" y="18288"/>
+                </a:cubicBezTo>
+                <a:cubicBezTo>
+                  <a:pt x="843" y="9577"/>
+                  <a:pt x="371" y="6900"/>
+                  <a:pt x="0" y="0"/>
+                </a:cubicBezTo>
+                <a:close/>
+              </a:path>
+            </a:pathLst>
+          </a:custGeom>
+          <a:solidFill>
+            <a:schemeClr val="accent2"/>
+          </a:solidFill>
+          <a:ln w="38100" cap="rnd">
+            <a:solidFill>
+              <a:schemeClr val="accent2"/>
+            </a:solidFill>
+            <a:round/>
+            <a:extLst>
+              <a:ext uri="{C807C97D-BFC1-408E-A445-0C87EB9F89A2}">
+                <ask:lineSketchStyleProps xmlns:ask="http://schemas.microsoft.com/office/drawing/2018/sketchyshapes" sd="1219033472">
+                  <a:prstGeom prst="rect">
+                    <a:avLst/>
+                  </a:prstGeom>
+                  <ask:type>
+                    <ask:lineSketchFreehand/>
+                  </ask:type>
+                </ask:lineSketchStyleProps>
+              </a:ext>
+            </a:extLst>
+          </a:ln>
+        </p:spPr>
+        <p:style>
+          <a:lnRef idx="2">
+            <a:schemeClr val="accent1">
+              <a:shade val="50000"/>
+            </a:schemeClr>
+          </a:lnRef>
+          <a:fillRef idx="1">
+            <a:schemeClr val="accent1"/>
+          </a:fillRef>
+          <a:effectRef idx="0">
+            <a:schemeClr val="accent1"/>
+          </a:effectRef>
+          <a:fontRef idx="minor">
+            <a:schemeClr val="lt1"/>
+          </a:fontRef>
+        </p:style>
+        <p:txBody>
+          <a:bodyPr rtlCol="0" anchor="ctr"/>
+          <a:lstStyle/>
+          <a:p>
+            <a:pPr algn="ctr"/>
+            <a:endParaRPr lang="en-US"/>
           </a:p>
         </p:txBody>
       </p:sp>
@@ -3470,9 +3813,12 @@
         </p:blipFill>
         <p:spPr>
           <a:xfrm>
-            <a:off x="4324865" y="935464"/>
-            <a:ext cx="6750523" cy="5742762"/>
+            <a:off x="4996657" y="640080"/>
+            <a:ext cx="6981421" cy="5934208"/>
           </a:xfrm>
+          <a:prstGeom prst="rect">
+            <a:avLst/>
+          </a:prstGeom>
         </p:spPr>
       </p:pic>
     </p:spTree>

--- a/FraudAnalysis_ReportedCases.pptx
+++ b/FraudAnalysis_ReportedCases.pptx
@@ -6,8 +6,8 @@
   </p:sldMasterIdLst>
   <p:sldIdLst>
     <p:sldId id="256" r:id="rId2"/>
-    <p:sldId id="257" r:id="rId3"/>
-    <p:sldId id="258" r:id="rId4"/>
+    <p:sldId id="258" r:id="rId3"/>
+    <p:sldId id="257" r:id="rId4"/>
     <p:sldId id="259" r:id="rId5"/>
     <p:sldId id="260" r:id="rId6"/>
     <p:sldId id="261" r:id="rId7"/>
@@ -109,6 +109,11 @@
       </a:defRPr>
     </a:lvl9pPr>
   </p:defaultTextStyle>
+  <p:extLst>
+    <p:ext uri="{EFAFB233-063F-42B5-8137-9DF3F51BA10A}">
+      <p15:sldGuideLst xmlns:p15="http://schemas.microsoft.com/office/powerpoint/2012/main"/>
+    </p:ext>
+  </p:extLst>
 </p:presentation>
 </file>
 
@@ -259,7 +264,7 @@
           <a:p>
             <a:fld id="{AC08C36E-A951-7143-BBAC-056211D60249}" type="datetimeFigureOut">
               <a:rPr lang="en-US" smtClean="0"/>
-              <a:t>8/13/26</a:t>
+              <a:t>8/14/26</a:t>
             </a:fld>
             <a:endParaRPr lang="en-US"/>
           </a:p>
@@ -457,7 +462,7 @@
           <a:p>
             <a:fld id="{AC08C36E-A951-7143-BBAC-056211D60249}" type="datetimeFigureOut">
               <a:rPr lang="en-US" smtClean="0"/>
-              <a:t>8/13/26</a:t>
+              <a:t>8/14/26</a:t>
             </a:fld>
             <a:endParaRPr lang="en-US"/>
           </a:p>
@@ -665,7 +670,7 @@
           <a:p>
             <a:fld id="{AC08C36E-A951-7143-BBAC-056211D60249}" type="datetimeFigureOut">
               <a:rPr lang="en-US" smtClean="0"/>
-              <a:t>8/13/26</a:t>
+              <a:t>8/14/26</a:t>
             </a:fld>
             <a:endParaRPr lang="en-US"/>
           </a:p>
@@ -863,7 +868,7 @@
           <a:p>
             <a:fld id="{AC08C36E-A951-7143-BBAC-056211D60249}" type="datetimeFigureOut">
               <a:rPr lang="en-US" smtClean="0"/>
-              <a:t>8/13/26</a:t>
+              <a:t>8/14/26</a:t>
             </a:fld>
             <a:endParaRPr lang="en-US"/>
           </a:p>
@@ -1138,7 +1143,7 @@
           <a:p>
             <a:fld id="{AC08C36E-A951-7143-BBAC-056211D60249}" type="datetimeFigureOut">
               <a:rPr lang="en-US" smtClean="0"/>
-              <a:t>8/13/26</a:t>
+              <a:t>8/14/26</a:t>
             </a:fld>
             <a:endParaRPr lang="en-US"/>
           </a:p>
@@ -1403,7 +1408,7 @@
           <a:p>
             <a:fld id="{AC08C36E-A951-7143-BBAC-056211D60249}" type="datetimeFigureOut">
               <a:rPr lang="en-US" smtClean="0"/>
-              <a:t>8/13/26</a:t>
+              <a:t>8/14/26</a:t>
             </a:fld>
             <a:endParaRPr lang="en-US"/>
           </a:p>
@@ -1815,7 +1820,7 @@
           <a:p>
             <a:fld id="{AC08C36E-A951-7143-BBAC-056211D60249}" type="datetimeFigureOut">
               <a:rPr lang="en-US" smtClean="0"/>
-              <a:t>8/13/26</a:t>
+              <a:t>8/14/26</a:t>
             </a:fld>
             <a:endParaRPr lang="en-US"/>
           </a:p>
@@ -1956,7 +1961,7 @@
           <a:p>
             <a:fld id="{AC08C36E-A951-7143-BBAC-056211D60249}" type="datetimeFigureOut">
               <a:rPr lang="en-US" smtClean="0"/>
-              <a:t>8/13/26</a:t>
+              <a:t>8/14/26</a:t>
             </a:fld>
             <a:endParaRPr lang="en-US"/>
           </a:p>
@@ -2069,7 +2074,7 @@
           <a:p>
             <a:fld id="{AC08C36E-A951-7143-BBAC-056211D60249}" type="datetimeFigureOut">
               <a:rPr lang="en-US" smtClean="0"/>
-              <a:t>8/13/26</a:t>
+              <a:t>8/14/26</a:t>
             </a:fld>
             <a:endParaRPr lang="en-US"/>
           </a:p>
@@ -2380,7 +2385,7 @@
           <a:p>
             <a:fld id="{AC08C36E-A951-7143-BBAC-056211D60249}" type="datetimeFigureOut">
               <a:rPr lang="en-US" smtClean="0"/>
-              <a:t>8/13/26</a:t>
+              <a:t>8/14/26</a:t>
             </a:fld>
             <a:endParaRPr lang="en-US"/>
           </a:p>
@@ -2668,7 +2673,7 @@
           <a:p>
             <a:fld id="{AC08C36E-A951-7143-BBAC-056211D60249}" type="datetimeFigureOut">
               <a:rPr lang="en-US" smtClean="0"/>
-              <a:t>8/13/26</a:t>
+              <a:t>8/14/26</a:t>
             </a:fld>
             <a:endParaRPr lang="en-US"/>
           </a:p>
@@ -2909,7 +2914,7 @@
           <a:p>
             <a:fld id="{AC08C36E-A951-7143-BBAC-056211D60249}" type="datetimeFigureOut">
               <a:rPr lang="en-US" smtClean="0"/>
-              <a:t>8/13/26</a:t>
+              <a:t>8/14/26</a:t>
             </a:fld>
             <a:endParaRPr lang="en-US"/>
           </a:p>
@@ -3392,6 +3397,96 @@
 <file path=ppt/slides/slide2.xml><?xml version="1.0" encoding="utf-8"?>
 <p:sld xmlns:a="http://schemas.openxmlformats.org/drawingml/2006/main" xmlns:r="http://schemas.openxmlformats.org/officeDocument/2006/relationships" xmlns:p="http://schemas.openxmlformats.org/presentationml/2006/main">
   <p:cSld>
+    <p:spTree>
+      <p:nvGrpSpPr>
+        <p:cNvPr id="1" name=""/>
+        <p:cNvGrpSpPr/>
+        <p:nvPr/>
+      </p:nvGrpSpPr>
+      <p:grpSpPr>
+        <a:xfrm>
+          <a:off x="0" y="0"/>
+          <a:ext cx="0" cy="0"/>
+          <a:chOff x="0" y="0"/>
+          <a:chExt cx="0" cy="0"/>
+        </a:xfrm>
+      </p:grpSpPr>
+      <p:sp>
+        <p:nvSpPr>
+          <p:cNvPr id="2" name="Title 1">
+            <a:extLst>
+              <a:ext uri="{FF2B5EF4-FFF2-40B4-BE49-F238E27FC236}">
+                <a16:creationId xmlns:a16="http://schemas.microsoft.com/office/drawing/2014/main" id="{501AF555-073A-60F9-8AA2-29CFBFC8345B}"/>
+              </a:ext>
+            </a:extLst>
+          </p:cNvPr>
+          <p:cNvSpPr>
+            <a:spLocks noGrp="1"/>
+          </p:cNvSpPr>
+          <p:nvPr>
+            <p:ph type="title"/>
+          </p:nvPr>
+        </p:nvSpPr>
+        <p:spPr/>
+        <p:txBody>
+          <a:bodyPr/>
+          <a:lstStyle/>
+          <a:p>
+            <a:r>
+              <a:rPr lang="en-US" dirty="0"/>
+              <a:t>What kind of claims to ask for records, ??</a:t>
+            </a:r>
+            <a:br>
+              <a:rPr lang="en-US" dirty="0"/>
+            </a:br>
+            <a:r>
+              <a:rPr lang="en-US" dirty="0"/>
+              <a:t>Limit to relevant providers or procedures</a:t>
+            </a:r>
+          </a:p>
+        </p:txBody>
+      </p:sp>
+      <p:sp>
+        <p:nvSpPr>
+          <p:cNvPr id="3" name="Content Placeholder 2">
+            <a:extLst>
+              <a:ext uri="{FF2B5EF4-FFF2-40B4-BE49-F238E27FC236}">
+                <a16:creationId xmlns:a16="http://schemas.microsoft.com/office/drawing/2014/main" id="{B65F7826-3D71-09B2-BAE2-58503E61D900}"/>
+              </a:ext>
+            </a:extLst>
+          </p:cNvPr>
+          <p:cNvSpPr>
+            <a:spLocks noGrp="1"/>
+          </p:cNvSpPr>
+          <p:nvPr>
+            <p:ph idx="1"/>
+          </p:nvPr>
+        </p:nvSpPr>
+        <p:spPr/>
+        <p:txBody>
+          <a:bodyPr/>
+          <a:lstStyle/>
+          <a:p>
+            <a:endParaRPr lang="en-US"/>
+          </a:p>
+        </p:txBody>
+      </p:sp>
+    </p:spTree>
+    <p:extLst>
+      <p:ext uri="{BB962C8B-B14F-4D97-AF65-F5344CB8AC3E}">
+        <p14:creationId xmlns:p14="http://schemas.microsoft.com/office/powerpoint/2010/main" val="3683847784"/>
+      </p:ext>
+    </p:extLst>
+  </p:cSld>
+  <p:clrMapOvr>
+    <a:masterClrMapping/>
+  </p:clrMapOvr>
+</p:sld>
+</file>
+
+<file path=ppt/slides/slide3.xml><?xml version="1.0" encoding="utf-8"?>
+<p:sld xmlns:a="http://schemas.openxmlformats.org/drawingml/2006/main" xmlns:r="http://schemas.openxmlformats.org/officeDocument/2006/relationships" xmlns:p="http://schemas.openxmlformats.org/presentationml/2006/main">
+  <p:cSld>
     <p:bg>
       <p:bgPr>
         <a:solidFill>
@@ -3503,7 +3598,7 @@
           <a:lstStyle/>
           <a:p>
             <a:r>
-              <a:rPr lang="en-US" sz="6100" kern="1200">
+              <a:rPr lang="en-US" sz="6100" kern="1200" dirty="0">
                 <a:solidFill>
                   <a:schemeClr val="tx1"/>
                 </a:solidFill>
@@ -3511,7 +3606,7 @@
                 <a:ea typeface="+mj-ea"/>
                 <a:cs typeface="+mj-cs"/>
               </a:rPr>
-              <a:t>Reported Hours More than P{ossible</a:t>
+              <a:t>Reported Hours More than Possible</a:t>
             </a:r>
           </a:p>
         </p:txBody>
@@ -3834,9 +3929,17 @@
 </p:sld>
 </file>
 
-<file path=ppt/slides/slide3.xml><?xml version="1.0" encoding="utf-8"?>
+<file path=ppt/slides/slide4.xml><?xml version="1.0" encoding="utf-8"?>
 <p:sld xmlns:a="http://schemas.openxmlformats.org/drawingml/2006/main" xmlns:r="http://schemas.openxmlformats.org/officeDocument/2006/relationships" xmlns:p="http://schemas.openxmlformats.org/presentationml/2006/main">
   <p:cSld>
+    <p:bg>
+      <p:bgPr>
+        <a:solidFill>
+          <a:schemeClr val="bg1"/>
+        </a:solidFill>
+        <a:effectLst/>
+      </p:bgPr>
+    </p:bg>
     <p:spTree>
       <p:nvGrpSpPr>
         <p:cNvPr id="1" name=""/>
@@ -3853,10 +3956,76 @@
       </p:grpSpPr>
       <p:sp>
         <p:nvSpPr>
+          <p:cNvPr id="10" name="Down Arrow 7">
+            <a:extLst>
+              <a:ext uri="{FF2B5EF4-FFF2-40B4-BE49-F238E27FC236}">
+                <a16:creationId xmlns:a16="http://schemas.microsoft.com/office/drawing/2014/main" id="{D4771268-CB57-404A-9271-370EB28F6090}"/>
+              </a:ext>
+              <a:ext uri="{C183D7F6-B498-43B3-948B-1728B52AA6E4}">
+                <adec:decorative xmlns:adec="http://schemas.microsoft.com/office/drawing/2017/decorative" val="1"/>
+              </a:ext>
+            </a:extLst>
+          </p:cNvPr>
+          <p:cNvSpPr>
+            <a:spLocks noGrp="1" noRot="1" noChangeAspect="1" noMove="1" noResize="1" noEditPoints="1" noAdjustHandles="1" noChangeArrowheads="1" noChangeShapeType="1" noTextEdit="1"/>
+          </p:cNvSpPr>
+          <p:nvPr>
+            <p:extLst>
+              <p:ext uri="{386F3935-93C4-4BCD-93E2-E3B085C9AB24}">
+                <p16:designElem xmlns:p16="http://schemas.microsoft.com/office/powerpoint/2015/main" val="1"/>
+              </p:ext>
+            </p:extLst>
+          </p:nvPr>
+        </p:nvSpPr>
+        <p:spPr>
+          <a:xfrm rot="16200000">
+            <a:off x="800100" y="1491343"/>
+            <a:ext cx="3333749" cy="3499103"/>
+          </a:xfrm>
+          <a:prstGeom prst="downArrow">
+            <a:avLst>
+              <a:gd name="adj1" fmla="val 100000"/>
+              <a:gd name="adj2" fmla="val 15788"/>
+            </a:avLst>
+          </a:prstGeom>
+          <a:solidFill>
+            <a:srgbClr val="404040"/>
+          </a:solidFill>
+          <a:ln w="53975">
+            <a:noFill/>
+          </a:ln>
+        </p:spPr>
+        <p:style>
+          <a:lnRef idx="2">
+            <a:schemeClr val="accent1">
+              <a:shade val="50000"/>
+            </a:schemeClr>
+          </a:lnRef>
+          <a:fillRef idx="1">
+            <a:schemeClr val="accent1"/>
+          </a:fillRef>
+          <a:effectRef idx="0">
+            <a:schemeClr val="accent1"/>
+          </a:effectRef>
+          <a:fontRef idx="minor">
+            <a:schemeClr val="lt1"/>
+          </a:fontRef>
+        </p:style>
+        <p:txBody>
+          <a:bodyPr rtlCol="0" anchor="ctr"/>
+          <a:lstStyle/>
+          <a:p>
+            <a:pPr algn="ctr"/>
+            <a:endParaRPr lang="en-US"/>
+          </a:p>
+        </p:txBody>
+      </p:sp>
+      <p:sp>
+        <p:nvSpPr>
           <p:cNvPr id="2" name="Title 1">
             <a:extLst>
               <a:ext uri="{FF2B5EF4-FFF2-40B4-BE49-F238E27FC236}">
-                <a16:creationId xmlns:a16="http://schemas.microsoft.com/office/drawing/2014/main" id="{501AF555-073A-60F9-8AA2-29CFBFC8345B}"/>
+                <a16:creationId xmlns:a16="http://schemas.microsoft.com/office/drawing/2014/main" id="{2A115860-35E0-8B5B-5C01-5653A90BB470}"/>
               </a:ext>
             </a:extLst>
           </p:cNvPr>
@@ -3867,120 +4036,66 @@
             <p:ph type="title"/>
           </p:nvPr>
         </p:nvSpPr>
-        <p:spPr/>
-        <p:txBody>
-          <a:bodyPr/>
-          <a:lstStyle/>
-          <a:p>
-            <a:endParaRPr lang="en-US"/>
-          </a:p>
-        </p:txBody>
-      </p:sp>
-      <p:sp>
-        <p:nvSpPr>
-          <p:cNvPr id="3" name="Content Placeholder 2">
-            <a:extLst>
-              <a:ext uri="{FF2B5EF4-FFF2-40B4-BE49-F238E27FC236}">
-                <a16:creationId xmlns:a16="http://schemas.microsoft.com/office/drawing/2014/main" id="{B65F7826-3D71-09B2-BAE2-58503E61D900}"/>
-              </a:ext>
-            </a:extLst>
-          </p:cNvPr>
-          <p:cNvSpPr>
-            <a:spLocks noGrp="1"/>
-          </p:cNvSpPr>
+        <p:spPr>
+          <a:xfrm>
+            <a:off x="1028700" y="1967266"/>
+            <a:ext cx="2628900" cy="2547257"/>
+          </a:xfrm>
+          <a:noFill/>
+        </p:spPr>
+        <p:txBody>
+          <a:bodyPr vert="horz" lIns="91440" tIns="45720" rIns="91440" bIns="45720" rtlCol="0" anchor="ctr">
+            <a:normAutofit/>
+          </a:bodyPr>
+          <a:lstStyle/>
+          <a:p>
+            <a:pPr algn="ctr"/>
+            <a:r>
+              <a:rPr lang="en-US" sz="3600" kern="1200">
+                <a:solidFill>
+                  <a:srgbClr val="FFFFFF"/>
+                </a:solidFill>
+                <a:latin typeface="+mj-lt"/>
+                <a:ea typeface="+mj-ea"/>
+                <a:cs typeface="+mj-cs"/>
+              </a:rPr>
+              <a:t>Why CBS-IL does not check the licenses?=</a:t>
+            </a:r>
+          </a:p>
+        </p:txBody>
+      </p:sp>
+      <p:pic>
+        <p:nvPicPr>
+          <p:cNvPr id="5" name="Content Placeholder 4">
+            <a:extLst>
+              <a:ext uri="{FF2B5EF4-FFF2-40B4-BE49-F238E27FC236}">
+                <a16:creationId xmlns:a16="http://schemas.microsoft.com/office/drawing/2014/main" id="{8B6A7F11-D788-FE4D-59BF-BAEC406B14A6}"/>
+              </a:ext>
+            </a:extLst>
+          </p:cNvPr>
+          <p:cNvPicPr>
+            <a:picLocks noGrp="1" noChangeAspect="1"/>
+          </p:cNvPicPr>
           <p:nvPr>
             <p:ph idx="1"/>
           </p:nvPr>
-        </p:nvSpPr>
-        <p:spPr/>
-        <p:txBody>
-          <a:bodyPr/>
-          <a:lstStyle/>
-          <a:p>
-            <a:endParaRPr lang="en-US"/>
-          </a:p>
-        </p:txBody>
-      </p:sp>
-    </p:spTree>
-    <p:extLst>
-      <p:ext uri="{BB962C8B-B14F-4D97-AF65-F5344CB8AC3E}">
-        <p14:creationId xmlns:p14="http://schemas.microsoft.com/office/powerpoint/2010/main" val="3683847784"/>
-      </p:ext>
-    </p:extLst>
-  </p:cSld>
-  <p:clrMapOvr>
-    <a:masterClrMapping/>
-  </p:clrMapOvr>
-</p:sld>
-</file>
-
-<file path=ppt/slides/slide4.xml><?xml version="1.0" encoding="utf-8"?>
-<p:sld xmlns:a="http://schemas.openxmlformats.org/drawingml/2006/main" xmlns:r="http://schemas.openxmlformats.org/officeDocument/2006/relationships" xmlns:p="http://schemas.openxmlformats.org/presentationml/2006/main">
-  <p:cSld>
-    <p:spTree>
-      <p:nvGrpSpPr>
-        <p:cNvPr id="1" name=""/>
-        <p:cNvGrpSpPr/>
-        <p:nvPr/>
-      </p:nvGrpSpPr>
-      <p:grpSpPr>
-        <a:xfrm>
-          <a:off x="0" y="0"/>
-          <a:ext cx="0" cy="0"/>
-          <a:chOff x="0" y="0"/>
-          <a:chExt cx="0" cy="0"/>
-        </a:xfrm>
-      </p:grpSpPr>
-      <p:sp>
-        <p:nvSpPr>
-          <p:cNvPr id="2" name="Title 1">
-            <a:extLst>
-              <a:ext uri="{FF2B5EF4-FFF2-40B4-BE49-F238E27FC236}">
-                <a16:creationId xmlns:a16="http://schemas.microsoft.com/office/drawing/2014/main" id="{2A115860-35E0-8B5B-5C01-5653A90BB470}"/>
-              </a:ext>
-            </a:extLst>
-          </p:cNvPr>
-          <p:cNvSpPr>
-            <a:spLocks noGrp="1"/>
-          </p:cNvSpPr>
-          <p:nvPr>
-            <p:ph type="title"/>
-          </p:nvPr>
-        </p:nvSpPr>
-        <p:spPr/>
-        <p:txBody>
-          <a:bodyPr/>
-          <a:lstStyle/>
-          <a:p>
-            <a:endParaRPr lang="en-US"/>
-          </a:p>
-        </p:txBody>
-      </p:sp>
-      <p:sp>
-        <p:nvSpPr>
-          <p:cNvPr id="3" name="Content Placeholder 2">
-            <a:extLst>
-              <a:ext uri="{FF2B5EF4-FFF2-40B4-BE49-F238E27FC236}">
-                <a16:creationId xmlns:a16="http://schemas.microsoft.com/office/drawing/2014/main" id="{808F0F8D-88CE-6B26-89D9-BCEBFE12789A}"/>
-              </a:ext>
-            </a:extLst>
-          </p:cNvPr>
-          <p:cNvSpPr>
-            <a:spLocks noGrp="1"/>
-          </p:cNvSpPr>
-          <p:nvPr>
-            <p:ph idx="1"/>
-          </p:nvPr>
-        </p:nvSpPr>
-        <p:spPr/>
-        <p:txBody>
-          <a:bodyPr/>
-          <a:lstStyle/>
-          <a:p>
-            <a:endParaRPr lang="en-US"/>
-          </a:p>
-        </p:txBody>
-      </p:sp>
+        </p:nvPicPr>
+        <p:blipFill>
+          <a:blip r:embed="rId2"/>
+          <a:stretch>
+            <a:fillRect/>
+          </a:stretch>
+        </p:blipFill>
+        <p:spPr>
+          <a:xfrm>
+            <a:off x="4777316" y="1003736"/>
+            <a:ext cx="6780700" cy="4848198"/>
+          </a:xfrm>
+          <a:prstGeom prst="rect">
+            <a:avLst/>
+          </a:prstGeom>
+        </p:spPr>
+      </p:pic>
     </p:spTree>
     <p:extLst>
       <p:ext uri="{BB962C8B-B14F-4D97-AF65-F5344CB8AC3E}">
@@ -3997,6 +4112,38 @@
 <file path=ppt/slides/slide5.xml><?xml version="1.0" encoding="utf-8"?>
 <p:sld xmlns:a="http://schemas.openxmlformats.org/drawingml/2006/main" xmlns:r="http://schemas.openxmlformats.org/officeDocument/2006/relationships" xmlns:p="http://schemas.openxmlformats.org/presentationml/2006/main">
   <p:cSld>
+    <p:bg>
+      <p:bgPr>
+        <a:gradFill rotWithShape="1">
+          <a:gsLst>
+            <a:gs pos="0">
+              <a:schemeClr val="bg2">
+                <a:tint val="93000"/>
+                <a:satMod val="150000"/>
+                <a:shade val="98000"/>
+                <a:lumMod val="102000"/>
+              </a:schemeClr>
+            </a:gs>
+            <a:gs pos="50000">
+              <a:schemeClr val="bg2">
+                <a:tint val="98000"/>
+                <a:satMod val="130000"/>
+                <a:shade val="90000"/>
+                <a:lumMod val="103000"/>
+              </a:schemeClr>
+            </a:gs>
+            <a:gs pos="100000">
+              <a:schemeClr val="bg2">
+                <a:shade val="63000"/>
+                <a:satMod val="120000"/>
+              </a:schemeClr>
+            </a:gs>
+          </a:gsLst>
+          <a:lin ang="5400000" scaled="0"/>
+        </a:gradFill>
+        <a:effectLst/>
+      </p:bgPr>
+    </p:bg>
     <p:spTree>
       <p:nvGrpSpPr>
         <p:cNvPr id="1" name=""/>
@@ -4013,6 +4160,71 @@
       </p:grpSpPr>
       <p:sp>
         <p:nvSpPr>
+          <p:cNvPr id="20" name="Rectangle: Rounded Corners 19">
+            <a:extLst>
+              <a:ext uri="{FF2B5EF4-FFF2-40B4-BE49-F238E27FC236}">
+                <a16:creationId xmlns:a16="http://schemas.microsoft.com/office/drawing/2014/main" id="{6AA24DE7-C336-4994-8C52-D9B3F3D0FA4D}"/>
+              </a:ext>
+              <a:ext uri="{C183D7F6-B498-43B3-948B-1728B52AA6E4}">
+                <adec:decorative xmlns:adec="http://schemas.microsoft.com/office/drawing/2017/decorative" val="1"/>
+              </a:ext>
+            </a:extLst>
+          </p:cNvPr>
+          <p:cNvSpPr>
+            <a:spLocks noGrp="1" noRot="1" noChangeAspect="1" noMove="1" noResize="1" noEditPoints="1" noAdjustHandles="1" noChangeArrowheads="1" noChangeShapeType="1" noTextEdit="1"/>
+          </p:cNvSpPr>
+          <p:nvPr>
+            <p:extLst>
+              <p:ext uri="{386F3935-93C4-4BCD-93E2-E3B085C9AB24}">
+                <p16:designElem xmlns:p16="http://schemas.microsoft.com/office/powerpoint/2015/main" val="1"/>
+              </p:ext>
+            </p:extLst>
+          </p:nvPr>
+        </p:nvSpPr>
+        <p:spPr>
+          <a:xfrm>
+            <a:off x="953311" y="953311"/>
+            <a:ext cx="10603149" cy="5263867"/>
+          </a:xfrm>
+          <a:prstGeom prst="roundRect">
+            <a:avLst>
+              <a:gd name="adj" fmla="val 1566"/>
+            </a:avLst>
+          </a:prstGeom>
+          <a:solidFill>
+            <a:srgbClr val="FFFFFF"/>
+          </a:solidFill>
+          <a:ln>
+            <a:noFill/>
+          </a:ln>
+        </p:spPr>
+        <p:style>
+          <a:lnRef idx="2">
+            <a:schemeClr val="accent1">
+              <a:shade val="50000"/>
+            </a:schemeClr>
+          </a:lnRef>
+          <a:fillRef idx="1">
+            <a:schemeClr val="accent1"/>
+          </a:fillRef>
+          <a:effectRef idx="0">
+            <a:schemeClr val="accent1"/>
+          </a:effectRef>
+          <a:fontRef idx="minor">
+            <a:schemeClr val="lt1"/>
+          </a:fontRef>
+        </p:style>
+        <p:txBody>
+          <a:bodyPr rtlCol="0" anchor="ctr"/>
+          <a:lstStyle/>
+          <a:p>
+            <a:pPr algn="ctr"/>
+            <a:endParaRPr lang="en-US"/>
+          </a:p>
+        </p:txBody>
+      </p:sp>
+      <p:sp>
+        <p:nvSpPr>
           <p:cNvPr id="2" name="Title 1">
             <a:extLst>
               <a:ext uri="{FF2B5EF4-FFF2-40B4-BE49-F238E27FC236}">
@@ -4027,40 +4239,76 @@
             <p:ph type="title"/>
           </p:nvPr>
         </p:nvSpPr>
-        <p:spPr/>
-        <p:txBody>
-          <a:bodyPr/>
-          <a:lstStyle/>
-          <a:p>
-            <a:endParaRPr lang="en-US"/>
-          </a:p>
-        </p:txBody>
-      </p:sp>
-      <p:sp>
-        <p:nvSpPr>
-          <p:cNvPr id="3" name="Content Placeholder 2">
-            <a:extLst>
-              <a:ext uri="{FF2B5EF4-FFF2-40B4-BE49-F238E27FC236}">
-                <a16:creationId xmlns:a16="http://schemas.microsoft.com/office/drawing/2014/main" id="{545094FE-ADF9-F2B1-09EF-93F0189D8D1F}"/>
-              </a:ext>
-            </a:extLst>
-          </p:cNvPr>
-          <p:cNvSpPr>
-            <a:spLocks noGrp="1"/>
-          </p:cNvSpPr>
+        <p:spPr>
+          <a:xfrm>
+            <a:off x="640080" y="640080"/>
+            <a:ext cx="2752354" cy="2709275"/>
+          </a:xfrm>
+          <a:prstGeom prst="rect">
+            <a:avLst/>
+          </a:prstGeom>
+          <a:solidFill>
+            <a:schemeClr val="accent1"/>
+          </a:solidFill>
+          <a:ln w="174625" cmpd="thinThick">
+            <a:solidFill>
+              <a:schemeClr val="accent1"/>
+            </a:solidFill>
+          </a:ln>
+        </p:spPr>
+        <p:txBody>
+          <a:bodyPr vert="horz" lIns="91440" tIns="45720" rIns="91440" bIns="45720" rtlCol="0" anchor="ctr">
+            <a:normAutofit/>
+          </a:bodyPr>
+          <a:lstStyle/>
+          <a:p>
+            <a:pPr algn="ctr"/>
+            <a:r>
+              <a:rPr lang="en-US" sz="2800" kern="1200">
+                <a:solidFill>
+                  <a:srgbClr val="FFFFFF"/>
+                </a:solidFill>
+                <a:latin typeface="+mj-lt"/>
+                <a:ea typeface="+mj-ea"/>
+                <a:cs typeface="+mj-cs"/>
+              </a:rPr>
+              <a:t>CoVID Fraud, Won’t the Volume shows sign of steep climb?</a:t>
+            </a:r>
+          </a:p>
+        </p:txBody>
+      </p:sp>
+      <p:pic>
+        <p:nvPicPr>
+          <p:cNvPr id="5" name="Content Placeholder 4" descr="A close-up of a document&#10;&#10;AI-generated content may be incorrect.">
+            <a:extLst>
+              <a:ext uri="{FF2B5EF4-FFF2-40B4-BE49-F238E27FC236}">
+                <a16:creationId xmlns:a16="http://schemas.microsoft.com/office/drawing/2014/main" id="{2F25211F-ECCC-BCFC-4AE4-CEF88FFC6BD1}"/>
+              </a:ext>
+            </a:extLst>
+          </p:cNvPr>
+          <p:cNvPicPr>
+            <a:picLocks noGrp="1" noChangeAspect="1"/>
+          </p:cNvPicPr>
           <p:nvPr>
             <p:ph idx="1"/>
           </p:nvPr>
-        </p:nvSpPr>
-        <p:spPr/>
-        <p:txBody>
-          <a:bodyPr/>
-          <a:lstStyle/>
-          <a:p>
-            <a:endParaRPr lang="en-US"/>
-          </a:p>
-        </p:txBody>
-      </p:sp>
+        </p:nvPicPr>
+        <p:blipFill>
+          <a:blip r:embed="rId2"/>
+          <a:stretch>
+            <a:fillRect/>
+          </a:stretch>
+        </p:blipFill>
+        <p:spPr>
+          <a:xfrm>
+            <a:off x="4156582" y="1596707"/>
+            <a:ext cx="6712244" cy="3977003"/>
+          </a:xfrm>
+          <a:prstGeom prst="rect">
+            <a:avLst/>
+          </a:prstGeom>
+        </p:spPr>
+      </p:pic>
     </p:spTree>
     <p:extLst>
       <p:ext uri="{BB962C8B-B14F-4D97-AF65-F5344CB8AC3E}">
@@ -4077,6 +4325,14 @@
 <file path=ppt/slides/slide6.xml><?xml version="1.0" encoding="utf-8"?>
 <p:sld xmlns:a="http://schemas.openxmlformats.org/drawingml/2006/main" xmlns:r="http://schemas.openxmlformats.org/officeDocument/2006/relationships" xmlns:p="http://schemas.openxmlformats.org/presentationml/2006/main">
   <p:cSld>
+    <p:bg>
+      <p:bgPr>
+        <a:solidFill>
+          <a:schemeClr val="bg1"/>
+        </a:solidFill>
+        <a:effectLst/>
+      </p:bgPr>
+    </p:bg>
     <p:spTree>
       <p:nvGrpSpPr>
         <p:cNvPr id="1" name=""/>
@@ -4093,6 +4349,69 @@
       </p:grpSpPr>
       <p:sp>
         <p:nvSpPr>
+          <p:cNvPr id="10" name="Flowchart: Document 9">
+            <a:extLst>
+              <a:ext uri="{FF2B5EF4-FFF2-40B4-BE49-F238E27FC236}">
+                <a16:creationId xmlns:a16="http://schemas.microsoft.com/office/drawing/2014/main" id="{D12DDE76-C203-4047-9998-63900085B5E8}"/>
+              </a:ext>
+              <a:ext uri="{C183D7F6-B498-43B3-948B-1728B52AA6E4}">
+                <adec:decorative xmlns:adec="http://schemas.microsoft.com/office/drawing/2017/decorative" val="1"/>
+              </a:ext>
+            </a:extLst>
+          </p:cNvPr>
+          <p:cNvSpPr>
+            <a:spLocks noGrp="1" noRot="1" noChangeAspect="1" noMove="1" noResize="1" noEditPoints="1" noAdjustHandles="1" noChangeArrowheads="1" noChangeShapeType="1" noTextEdit="1"/>
+          </p:cNvSpPr>
+          <p:nvPr>
+            <p:extLst>
+              <p:ext uri="{386F3935-93C4-4BCD-93E2-E3B085C9AB24}">
+                <p16:designElem xmlns:p16="http://schemas.microsoft.com/office/powerpoint/2015/main" val="1"/>
+              </p:ext>
+            </p:extLst>
+          </p:nvPr>
+        </p:nvSpPr>
+        <p:spPr>
+          <a:xfrm>
+            <a:off x="638175" y="0"/>
+            <a:ext cx="3248025" cy="3400426"/>
+          </a:xfrm>
+          <a:prstGeom prst="flowChartDocument">
+            <a:avLst/>
+          </a:prstGeom>
+          <a:solidFill>
+            <a:schemeClr val="accent1"/>
+          </a:solidFill>
+          <a:ln>
+            <a:noFill/>
+          </a:ln>
+        </p:spPr>
+        <p:style>
+          <a:lnRef idx="2">
+            <a:schemeClr val="accent1">
+              <a:shade val="50000"/>
+            </a:schemeClr>
+          </a:lnRef>
+          <a:fillRef idx="1">
+            <a:schemeClr val="accent1"/>
+          </a:fillRef>
+          <a:effectRef idx="0">
+            <a:schemeClr val="accent1"/>
+          </a:effectRef>
+          <a:fontRef idx="minor">
+            <a:schemeClr val="lt1"/>
+          </a:fontRef>
+        </p:style>
+        <p:txBody>
+          <a:bodyPr rtlCol="0" anchor="ctr"/>
+          <a:lstStyle/>
+          <a:p>
+            <a:pPr algn="ctr"/>
+            <a:endParaRPr lang="en-US"/>
+          </a:p>
+        </p:txBody>
+      </p:sp>
+      <p:sp>
+        <p:nvSpPr>
           <p:cNvPr id="2" name="Title 1">
             <a:extLst>
               <a:ext uri="{FF2B5EF4-FFF2-40B4-BE49-F238E27FC236}">
@@ -4107,40 +4426,64 @@
             <p:ph type="title"/>
           </p:nvPr>
         </p:nvSpPr>
-        <p:spPr/>
-        <p:txBody>
-          <a:bodyPr/>
-          <a:lstStyle/>
-          <a:p>
-            <a:endParaRPr lang="en-US"/>
-          </a:p>
-        </p:txBody>
-      </p:sp>
-      <p:sp>
-        <p:nvSpPr>
-          <p:cNvPr id="3" name="Content Placeholder 2">
-            <a:extLst>
-              <a:ext uri="{FF2B5EF4-FFF2-40B4-BE49-F238E27FC236}">
-                <a16:creationId xmlns:a16="http://schemas.microsoft.com/office/drawing/2014/main" id="{6447A588-584C-E931-2730-8DA499BBC46B}"/>
-              </a:ext>
-            </a:extLst>
-          </p:cNvPr>
-          <p:cNvSpPr>
-            <a:spLocks noGrp="1"/>
-          </p:cNvSpPr>
+        <p:spPr>
+          <a:xfrm>
+            <a:off x="838200" y="171162"/>
+            <a:ext cx="2840182" cy="2371148"/>
+          </a:xfrm>
+        </p:spPr>
+        <p:txBody>
+          <a:bodyPr vert="horz" lIns="91440" tIns="45720" rIns="91440" bIns="45720" rtlCol="0" anchor="ctr">
+            <a:normAutofit/>
+          </a:bodyPr>
+          <a:lstStyle/>
+          <a:p>
+            <a:r>
+              <a:rPr lang="en-US" sz="3200" kern="1200">
+                <a:solidFill>
+                  <a:srgbClr val="FFFFFF"/>
+                </a:solidFill>
+                <a:latin typeface="+mj-lt"/>
+                <a:ea typeface="+mj-ea"/>
+                <a:cs typeface="+mj-cs"/>
+              </a:rPr>
+              <a:t>Claims with Deseased Patients</a:t>
+            </a:r>
+          </a:p>
+        </p:txBody>
+      </p:sp>
+      <p:pic>
+        <p:nvPicPr>
+          <p:cNvPr id="5" name="Content Placeholder 4" descr="A screenshot of a text&#10;&#10;AI-generated content may be incorrect.">
+            <a:extLst>
+              <a:ext uri="{FF2B5EF4-FFF2-40B4-BE49-F238E27FC236}">
+                <a16:creationId xmlns:a16="http://schemas.microsoft.com/office/drawing/2014/main" id="{D2115478-6EE5-A9A1-383D-2EDD98AB0DC8}"/>
+              </a:ext>
+            </a:extLst>
+          </p:cNvPr>
+          <p:cNvPicPr>
+            <a:picLocks noGrp="1" noChangeAspect="1"/>
+          </p:cNvPicPr>
           <p:nvPr>
             <p:ph idx="1"/>
           </p:nvPr>
-        </p:nvSpPr>
-        <p:spPr/>
-        <p:txBody>
-          <a:bodyPr/>
-          <a:lstStyle/>
-          <a:p>
-            <a:endParaRPr lang="en-US"/>
-          </a:p>
-        </p:txBody>
-      </p:sp>
+        </p:nvPicPr>
+        <p:blipFill>
+          <a:blip r:embed="rId2"/>
+          <a:stretch>
+            <a:fillRect/>
+          </a:stretch>
+        </p:blipFill>
+        <p:spPr>
+          <a:xfrm>
+            <a:off x="4207933" y="1087461"/>
+            <a:ext cx="7347537" cy="4684053"/>
+          </a:xfrm>
+          <a:prstGeom prst="rect">
+            <a:avLst/>
+          </a:prstGeom>
+        </p:spPr>
+      </p:pic>
     </p:spTree>
     <p:extLst>
       <p:ext uri="{BB962C8B-B14F-4D97-AF65-F5344CB8AC3E}">

--- a/FraudAnalysis_ReportedCases.pptx
+++ b/FraudAnalysis_ReportedCases.pptx
@@ -11,6 +11,11 @@
     <p:sldId id="259" r:id="rId5"/>
     <p:sldId id="260" r:id="rId6"/>
     <p:sldId id="261" r:id="rId7"/>
+    <p:sldId id="262" r:id="rId8"/>
+    <p:sldId id="263" r:id="rId9"/>
+    <p:sldId id="264" r:id="rId10"/>
+    <p:sldId id="265" r:id="rId11"/>
+    <p:sldId id="266" r:id="rId12"/>
   </p:sldIdLst>
   <p:sldSz cx="12192000" cy="6858000"/>
   <p:notesSz cx="6858000" cy="9144000"/>
@@ -3394,6 +3399,166 @@
 </p:sld>
 </file>
 
+<file path=ppt/slides/slide10.xml><?xml version="1.0" encoding="utf-8"?>
+<p:sld xmlns:a="http://schemas.openxmlformats.org/drawingml/2006/main" xmlns:r="http://schemas.openxmlformats.org/officeDocument/2006/relationships" xmlns:p="http://schemas.openxmlformats.org/presentationml/2006/main">
+  <p:cSld>
+    <p:spTree>
+      <p:nvGrpSpPr>
+        <p:cNvPr id="1" name=""/>
+        <p:cNvGrpSpPr/>
+        <p:nvPr/>
+      </p:nvGrpSpPr>
+      <p:grpSpPr>
+        <a:xfrm>
+          <a:off x="0" y="0"/>
+          <a:ext cx="0" cy="0"/>
+          <a:chOff x="0" y="0"/>
+          <a:chExt cx="0" cy="0"/>
+        </a:xfrm>
+      </p:grpSpPr>
+      <p:sp>
+        <p:nvSpPr>
+          <p:cNvPr id="2" name="Title 1">
+            <a:extLst>
+              <a:ext uri="{FF2B5EF4-FFF2-40B4-BE49-F238E27FC236}">
+                <a16:creationId xmlns:a16="http://schemas.microsoft.com/office/drawing/2014/main" id="{977671EF-DC5A-501B-1577-E6EB7D7FE776}"/>
+              </a:ext>
+            </a:extLst>
+          </p:cNvPr>
+          <p:cNvSpPr>
+            <a:spLocks noGrp="1"/>
+          </p:cNvSpPr>
+          <p:nvPr>
+            <p:ph type="title"/>
+          </p:nvPr>
+        </p:nvSpPr>
+        <p:spPr/>
+        <p:txBody>
+          <a:bodyPr/>
+          <a:lstStyle/>
+          <a:p>
+            <a:endParaRPr lang="en-US"/>
+          </a:p>
+        </p:txBody>
+      </p:sp>
+      <p:sp>
+        <p:nvSpPr>
+          <p:cNvPr id="3" name="Content Placeholder 2">
+            <a:extLst>
+              <a:ext uri="{FF2B5EF4-FFF2-40B4-BE49-F238E27FC236}">
+                <a16:creationId xmlns:a16="http://schemas.microsoft.com/office/drawing/2014/main" id="{31B7F192-B998-C1C3-4069-1F73A917AAEA}"/>
+              </a:ext>
+            </a:extLst>
+          </p:cNvPr>
+          <p:cNvSpPr>
+            <a:spLocks noGrp="1"/>
+          </p:cNvSpPr>
+          <p:nvPr>
+            <p:ph idx="1"/>
+          </p:nvPr>
+        </p:nvSpPr>
+        <p:spPr/>
+        <p:txBody>
+          <a:bodyPr/>
+          <a:lstStyle/>
+          <a:p>
+            <a:endParaRPr lang="en-US"/>
+          </a:p>
+        </p:txBody>
+      </p:sp>
+    </p:spTree>
+    <p:extLst>
+      <p:ext uri="{BB962C8B-B14F-4D97-AF65-F5344CB8AC3E}">
+        <p14:creationId xmlns:p14="http://schemas.microsoft.com/office/powerpoint/2010/main" val="893745536"/>
+      </p:ext>
+    </p:extLst>
+  </p:cSld>
+  <p:clrMapOvr>
+    <a:masterClrMapping/>
+  </p:clrMapOvr>
+</p:sld>
+</file>
+
+<file path=ppt/slides/slide11.xml><?xml version="1.0" encoding="utf-8"?>
+<p:sld xmlns:a="http://schemas.openxmlformats.org/drawingml/2006/main" xmlns:r="http://schemas.openxmlformats.org/officeDocument/2006/relationships" xmlns:p="http://schemas.openxmlformats.org/presentationml/2006/main">
+  <p:cSld>
+    <p:spTree>
+      <p:nvGrpSpPr>
+        <p:cNvPr id="1" name=""/>
+        <p:cNvGrpSpPr/>
+        <p:nvPr/>
+      </p:nvGrpSpPr>
+      <p:grpSpPr>
+        <a:xfrm>
+          <a:off x="0" y="0"/>
+          <a:ext cx="0" cy="0"/>
+          <a:chOff x="0" y="0"/>
+          <a:chExt cx="0" cy="0"/>
+        </a:xfrm>
+      </p:grpSpPr>
+      <p:sp>
+        <p:nvSpPr>
+          <p:cNvPr id="2" name="Title 1">
+            <a:extLst>
+              <a:ext uri="{FF2B5EF4-FFF2-40B4-BE49-F238E27FC236}">
+                <a16:creationId xmlns:a16="http://schemas.microsoft.com/office/drawing/2014/main" id="{289DAD68-2393-3D4E-FCED-64BE75F08FD2}"/>
+              </a:ext>
+            </a:extLst>
+          </p:cNvPr>
+          <p:cNvSpPr>
+            <a:spLocks noGrp="1"/>
+          </p:cNvSpPr>
+          <p:nvPr>
+            <p:ph type="title"/>
+          </p:nvPr>
+        </p:nvSpPr>
+        <p:spPr/>
+        <p:txBody>
+          <a:bodyPr/>
+          <a:lstStyle/>
+          <a:p>
+            <a:endParaRPr lang="en-US"/>
+          </a:p>
+        </p:txBody>
+      </p:sp>
+      <p:sp>
+        <p:nvSpPr>
+          <p:cNvPr id="3" name="Content Placeholder 2">
+            <a:extLst>
+              <a:ext uri="{FF2B5EF4-FFF2-40B4-BE49-F238E27FC236}">
+                <a16:creationId xmlns:a16="http://schemas.microsoft.com/office/drawing/2014/main" id="{3A316393-0A5F-0FD4-72C5-EBDF38B0BA4C}"/>
+              </a:ext>
+            </a:extLst>
+          </p:cNvPr>
+          <p:cNvSpPr>
+            <a:spLocks noGrp="1"/>
+          </p:cNvSpPr>
+          <p:nvPr>
+            <p:ph idx="1"/>
+          </p:nvPr>
+        </p:nvSpPr>
+        <p:spPr/>
+        <p:txBody>
+          <a:bodyPr/>
+          <a:lstStyle/>
+          <a:p>
+            <a:endParaRPr lang="en-US"/>
+          </a:p>
+        </p:txBody>
+      </p:sp>
+    </p:spTree>
+    <p:extLst>
+      <p:ext uri="{BB962C8B-B14F-4D97-AF65-F5344CB8AC3E}">
+        <p14:creationId xmlns:p14="http://schemas.microsoft.com/office/powerpoint/2010/main" val="1769426633"/>
+      </p:ext>
+    </p:extLst>
+  </p:cSld>
+  <p:clrMapOvr>
+    <a:masterClrMapping/>
+  </p:clrMapOvr>
+</p:sld>
+</file>
+
 <file path=ppt/slides/slide2.xml><?xml version="1.0" encoding="utf-8"?>
 <p:sld xmlns:a="http://schemas.openxmlformats.org/drawingml/2006/main" xmlns:r="http://schemas.openxmlformats.org/officeDocument/2006/relationships" xmlns:p="http://schemas.openxmlformats.org/presentationml/2006/main">
   <p:cSld>
@@ -4488,6 +4653,253 @@
     <p:extLst>
       <p:ext uri="{BB962C8B-B14F-4D97-AF65-F5344CB8AC3E}">
         <p14:creationId xmlns:p14="http://schemas.microsoft.com/office/powerpoint/2010/main" val="4264517955"/>
+      </p:ext>
+    </p:extLst>
+  </p:cSld>
+  <p:clrMapOvr>
+    <a:masterClrMapping/>
+  </p:clrMapOvr>
+</p:sld>
+</file>
+
+<file path=ppt/slides/slide7.xml><?xml version="1.0" encoding="utf-8"?>
+<p:sld xmlns:a="http://schemas.openxmlformats.org/drawingml/2006/main" xmlns:r="http://schemas.openxmlformats.org/officeDocument/2006/relationships" xmlns:p="http://schemas.openxmlformats.org/presentationml/2006/main">
+  <p:cSld>
+    <p:spTree>
+      <p:nvGrpSpPr>
+        <p:cNvPr id="1" name=""/>
+        <p:cNvGrpSpPr/>
+        <p:nvPr/>
+      </p:nvGrpSpPr>
+      <p:grpSpPr>
+        <a:xfrm>
+          <a:off x="0" y="0"/>
+          <a:ext cx="0" cy="0"/>
+          <a:chOff x="0" y="0"/>
+          <a:chExt cx="0" cy="0"/>
+        </a:xfrm>
+      </p:grpSpPr>
+      <p:sp>
+        <p:nvSpPr>
+          <p:cNvPr id="2" name="Title 1">
+            <a:extLst>
+              <a:ext uri="{FF2B5EF4-FFF2-40B4-BE49-F238E27FC236}">
+                <a16:creationId xmlns:a16="http://schemas.microsoft.com/office/drawing/2014/main" id="{B5C8779D-68C9-79DF-BB63-5BBEC0A0706D}"/>
+              </a:ext>
+            </a:extLst>
+          </p:cNvPr>
+          <p:cNvSpPr>
+            <a:spLocks noGrp="1"/>
+          </p:cNvSpPr>
+          <p:nvPr>
+            <p:ph type="title"/>
+          </p:nvPr>
+        </p:nvSpPr>
+        <p:spPr/>
+        <p:txBody>
+          <a:bodyPr/>
+          <a:lstStyle/>
+          <a:p>
+            <a:r>
+              <a:rPr lang="en-US" dirty="0"/>
+              <a:t>Use real person, but fake the encounter</a:t>
+            </a:r>
+          </a:p>
+        </p:txBody>
+      </p:sp>
+      <p:pic>
+        <p:nvPicPr>
+          <p:cNvPr id="5" name="Content Placeholder 4" descr="A screenshot of a computer&#10;&#10;AI-generated content may be incorrect.">
+            <a:extLst>
+              <a:ext uri="{FF2B5EF4-FFF2-40B4-BE49-F238E27FC236}">
+                <a16:creationId xmlns:a16="http://schemas.microsoft.com/office/drawing/2014/main" id="{4940E620-801F-B7A4-F46B-3BF834AEBBEE}"/>
+              </a:ext>
+            </a:extLst>
+          </p:cNvPr>
+          <p:cNvPicPr>
+            <a:picLocks noGrp="1" noChangeAspect="1"/>
+          </p:cNvPicPr>
+          <p:nvPr>
+            <p:ph idx="1"/>
+          </p:nvPr>
+        </p:nvPicPr>
+        <p:blipFill>
+          <a:blip r:embed="rId2"/>
+          <a:stretch>
+            <a:fillRect/>
+          </a:stretch>
+        </p:blipFill>
+        <p:spPr>
+          <a:xfrm>
+            <a:off x="1246071" y="1956253"/>
+            <a:ext cx="9699857" cy="4351338"/>
+          </a:xfrm>
+        </p:spPr>
+      </p:pic>
+    </p:spTree>
+    <p:extLst>
+      <p:ext uri="{BB962C8B-B14F-4D97-AF65-F5344CB8AC3E}">
+        <p14:creationId xmlns:p14="http://schemas.microsoft.com/office/powerpoint/2010/main" val="3679300118"/>
+      </p:ext>
+    </p:extLst>
+  </p:cSld>
+  <p:clrMapOvr>
+    <a:masterClrMapping/>
+  </p:clrMapOvr>
+</p:sld>
+</file>
+
+<file path=ppt/slides/slide8.xml><?xml version="1.0" encoding="utf-8"?>
+<p:sld xmlns:a="http://schemas.openxmlformats.org/drawingml/2006/main" xmlns:r="http://schemas.openxmlformats.org/officeDocument/2006/relationships" xmlns:p="http://schemas.openxmlformats.org/presentationml/2006/main">
+  <p:cSld>
+    <p:spTree>
+      <p:nvGrpSpPr>
+        <p:cNvPr id="1" name=""/>
+        <p:cNvGrpSpPr/>
+        <p:nvPr/>
+      </p:nvGrpSpPr>
+      <p:grpSpPr>
+        <a:xfrm>
+          <a:off x="0" y="0"/>
+          <a:ext cx="0" cy="0"/>
+          <a:chOff x="0" y="0"/>
+          <a:chExt cx="0" cy="0"/>
+        </a:xfrm>
+      </p:grpSpPr>
+      <p:sp>
+        <p:nvSpPr>
+          <p:cNvPr id="2" name="Title 1">
+            <a:extLst>
+              <a:ext uri="{FF2B5EF4-FFF2-40B4-BE49-F238E27FC236}">
+                <a16:creationId xmlns:a16="http://schemas.microsoft.com/office/drawing/2014/main" id="{2EB0523A-8D10-3A18-FD37-6C680B216908}"/>
+              </a:ext>
+            </a:extLst>
+          </p:cNvPr>
+          <p:cNvSpPr>
+            <a:spLocks noGrp="1"/>
+          </p:cNvSpPr>
+          <p:nvPr>
+            <p:ph type="title"/>
+          </p:nvPr>
+        </p:nvSpPr>
+        <p:spPr/>
+        <p:txBody>
+          <a:bodyPr/>
+          <a:lstStyle/>
+          <a:p>
+            <a:endParaRPr lang="en-US"/>
+          </a:p>
+        </p:txBody>
+      </p:sp>
+      <p:sp>
+        <p:nvSpPr>
+          <p:cNvPr id="3" name="Content Placeholder 2">
+            <a:extLst>
+              <a:ext uri="{FF2B5EF4-FFF2-40B4-BE49-F238E27FC236}">
+                <a16:creationId xmlns:a16="http://schemas.microsoft.com/office/drawing/2014/main" id="{DB331900-FC2F-E0D3-AF54-708993DA8B8F}"/>
+              </a:ext>
+            </a:extLst>
+          </p:cNvPr>
+          <p:cNvSpPr>
+            <a:spLocks noGrp="1"/>
+          </p:cNvSpPr>
+          <p:nvPr>
+            <p:ph idx="1"/>
+          </p:nvPr>
+        </p:nvSpPr>
+        <p:spPr/>
+        <p:txBody>
+          <a:bodyPr/>
+          <a:lstStyle/>
+          <a:p>
+            <a:endParaRPr lang="en-US"/>
+          </a:p>
+        </p:txBody>
+      </p:sp>
+    </p:spTree>
+    <p:extLst>
+      <p:ext uri="{BB962C8B-B14F-4D97-AF65-F5344CB8AC3E}">
+        <p14:creationId xmlns:p14="http://schemas.microsoft.com/office/powerpoint/2010/main" val="1209917606"/>
+      </p:ext>
+    </p:extLst>
+  </p:cSld>
+  <p:clrMapOvr>
+    <a:masterClrMapping/>
+  </p:clrMapOvr>
+</p:sld>
+</file>
+
+<file path=ppt/slides/slide9.xml><?xml version="1.0" encoding="utf-8"?>
+<p:sld xmlns:a="http://schemas.openxmlformats.org/drawingml/2006/main" xmlns:r="http://schemas.openxmlformats.org/officeDocument/2006/relationships" xmlns:p="http://schemas.openxmlformats.org/presentationml/2006/main">
+  <p:cSld>
+    <p:spTree>
+      <p:nvGrpSpPr>
+        <p:cNvPr id="1" name=""/>
+        <p:cNvGrpSpPr/>
+        <p:nvPr/>
+      </p:nvGrpSpPr>
+      <p:grpSpPr>
+        <a:xfrm>
+          <a:off x="0" y="0"/>
+          <a:ext cx="0" cy="0"/>
+          <a:chOff x="0" y="0"/>
+          <a:chExt cx="0" cy="0"/>
+        </a:xfrm>
+      </p:grpSpPr>
+      <p:sp>
+        <p:nvSpPr>
+          <p:cNvPr id="2" name="Title 1">
+            <a:extLst>
+              <a:ext uri="{FF2B5EF4-FFF2-40B4-BE49-F238E27FC236}">
+                <a16:creationId xmlns:a16="http://schemas.microsoft.com/office/drawing/2014/main" id="{33D88109-A048-5441-C72A-E359A89F202A}"/>
+              </a:ext>
+            </a:extLst>
+          </p:cNvPr>
+          <p:cNvSpPr>
+            <a:spLocks noGrp="1"/>
+          </p:cNvSpPr>
+          <p:nvPr>
+            <p:ph type="title"/>
+          </p:nvPr>
+        </p:nvSpPr>
+        <p:spPr/>
+        <p:txBody>
+          <a:bodyPr/>
+          <a:lstStyle/>
+          <a:p>
+            <a:endParaRPr lang="en-US"/>
+          </a:p>
+        </p:txBody>
+      </p:sp>
+      <p:sp>
+        <p:nvSpPr>
+          <p:cNvPr id="3" name="Content Placeholder 2">
+            <a:extLst>
+              <a:ext uri="{FF2B5EF4-FFF2-40B4-BE49-F238E27FC236}">
+                <a16:creationId xmlns:a16="http://schemas.microsoft.com/office/drawing/2014/main" id="{E9FC93CC-2D82-CF5A-1E37-F187ED63119F}"/>
+              </a:ext>
+            </a:extLst>
+          </p:cNvPr>
+          <p:cNvSpPr>
+            <a:spLocks noGrp="1"/>
+          </p:cNvSpPr>
+          <p:nvPr>
+            <p:ph idx="1"/>
+          </p:nvPr>
+        </p:nvSpPr>
+        <p:spPr/>
+        <p:txBody>
+          <a:bodyPr/>
+          <a:lstStyle/>
+          <a:p>
+            <a:endParaRPr lang="en-US"/>
+          </a:p>
+        </p:txBody>
+      </p:sp>
+    </p:spTree>
+    <p:extLst>
+      <p:ext uri="{BB962C8B-B14F-4D97-AF65-F5344CB8AC3E}">
+        <p14:creationId xmlns:p14="http://schemas.microsoft.com/office/powerpoint/2010/main" val="3447013980"/>
       </p:ext>
     </p:extLst>
   </p:cSld>
